--- a/curso_es/pptx/S23.pptx
+++ b/curso_es/pptx/S23.pptx
@@ -4110,7 +4110,7 @@
                 </a:solidFill>
                 <a:latin typeface="Nunito Sans"/>
               </a:rPr>
-              <a:t>Dylan: «Seguro que Kevin copió en el examen. Nadie puede demostrar que no copiara».</a:t>
+              <a:t>Un chico: «Seguro que un compañero copió en el examen. Nadie puede demostrar que no copiara».</a:t>
             </a:r>
           </a:p>
         </p:txBody>
@@ -4158,7 +4158,7 @@
                 </a:solidFill>
                 <a:latin typeface="Nunito Sans"/>
               </a:rPr>
-              <a:t>¿Qué razón da Dylan? Que nadie puede demostrar lo contrario.</a:t>
+              <a:t>¿Qué razón da ese chico? Que nadie puede demostrar lo contrario.</a:t>
             </a:r>
           </a:p>
           <a:p>
@@ -4419,7 +4419,7 @@
                 </a:solidFill>
                 <a:latin typeface="Nunito Sans"/>
               </a:rPr>
-              <a:t>Yasmin: «Esta app de noticias dice la verdad». Leire: «¿Cómo lo sabes?». Yasmin: «Porque en la propia app pone que todas sus noticias son verdad».</a:t>
+              <a:t>Una chica: «Esta app de noticias dice la verdad». Un chico: «¿Cómo lo sabes?». La chica: «Porque en la propia app pone que todas sus noticias son verdad».</a:t>
             </a:r>
           </a:p>
         </p:txBody>
@@ -4728,7 +4728,7 @@
                 </a:solidFill>
                 <a:latin typeface="Nunito Sans"/>
               </a:rPr>
-              <a:t>La jefa de estudios: «No hay pruebas de que Kevin copiara en el examen. Así que no se le castiga».</a:t>
+              <a:t>La jefa de estudios: «No hay pruebas de que un alumno copiara en el examen. Así que no se le castiga».</a:t>
             </a:r>
           </a:p>
         </p:txBody>
@@ -6526,7 +6526,7 @@
                 </a:solidFill>
                 <a:latin typeface="Nunito Sans"/>
               </a:rPr>
-              <a:t>Pregunta que desmonta la causa falsa: ¿podría ser ______ o haber otra causa?  (sesión 22)</a:t>
+              <a:t>Explicaciones que olvida la causa falsa: la casualidad, una ______ causa o que sea al revés.  (sesión 22)</a:t>
             </a:r>
           </a:p>
           <a:p>
@@ -6551,7 +6551,7 @@
                 </a:solidFill>
                 <a:latin typeface="Nunito Sans"/>
               </a:rPr>
-              <a:t>La causa falsa olvida que «después de» no es «por ______ de».  (sesión 22)</a:t>
+              <a:t>La causa falsa cree que una cosa ______ otra solo porque pasó antes o van juntas.  (sesión 22)</a:t>
             </a:r>
           </a:p>
           <a:p>
@@ -6728,7 +6728,7 @@
                 </a:solidFill>
                 <a:latin typeface="Nunito Sans"/>
               </a:rPr>
-              <a:t>Pregunta que desmonta la causa falsa: ¿podría ser </a:t>
+              <a:t>Explicaciones que olvida la causa falsa: la casualidad, una </a:t>
             </a:r>
             <a:r>
               <a:rPr sz="2600" b="1">
@@ -6737,7 +6737,7 @@
                 </a:solidFill>
                 <a:latin typeface="Nunito Sans"/>
               </a:rPr>
-              <a:t>casualidad</a:t>
+              <a:t>tercera</a:t>
             </a:r>
             <a:r>
               <a:rPr sz="2600" b="0">
@@ -6746,7 +6746,7 @@
                 </a:solidFill>
                 <a:latin typeface="Nunito Sans"/>
               </a:rPr>
-              <a:t> o haber otra causa?  (sesión 22)</a:t>
+              <a:t> causa o que sea al revés.  (sesión 22)</a:t>
             </a:r>
           </a:p>
           <a:p>
@@ -6771,7 +6771,7 @@
                 </a:solidFill>
                 <a:latin typeface="Nunito Sans"/>
               </a:rPr>
-              <a:t>La causa falsa olvida que «después de» no es «por </a:t>
+              <a:t>La causa falsa cree que una cosa </a:t>
             </a:r>
             <a:r>
               <a:rPr sz="2600" b="1">
@@ -6780,7 +6780,7 @@
                 </a:solidFill>
                 <a:latin typeface="Nunito Sans"/>
               </a:rPr>
-              <a:t>culpa</a:t>
+              <a:t>causa</a:t>
             </a:r>
             <a:r>
               <a:rPr sz="2600" b="0">
@@ -6789,7 +6789,7 @@
                 </a:solidFill>
                 <a:latin typeface="Nunito Sans"/>
               </a:rPr>
-              <a:t> de».  (sesión 22)</a:t>
+              <a:t> otra solo porque pasó antes o van juntas.  (sesión 22)</a:t>
             </a:r>
           </a:p>
           <a:p>
